--- a/交付物-doc-pdf-ppt/AI内容课_VerB_CMO战略版_幻灯片_可编辑源(PPTX含NLP备注).pptx
+++ b/交付物-doc-pdf-ppt/AI内容课_VerB_CMO战略版_幻灯片_可编辑源(PPTX含NLP备注).pptx
@@ -11683,7 +11683,7 @@
                 <a:ea typeface="PingFang SC"/>
                 <a:cs typeface="PingFang SC"/>
               </a:rPr>
-              <a:t>8 分镜脚本→锁人物→逐镜→拼接</a:t>
+              <a:t>8 分镜→锁人物→逐镜→拼接→ChatCut 后期</a:t>
             </a:r>
           </a:p>
         </p:txBody>
@@ -11727,7 +11727,7 @@
                 <a:ea typeface="PingFang SC"/>
                 <a:cs typeface="PingFang SC"/>
               </a:rPr>
-              <a:t>1 支约 90 秒短视频</a:t>
+              <a:t>1 支可直接发的成品</a:t>
             </a:r>
           </a:p>
         </p:txBody>
